--- a/statistics_14_experimental_design.pptx
+++ b/statistics_14_experimental_design.pptx
@@ -13499,7 +13499,7 @@
             </a:r>
             <a:r>
               <a:rPr lang="cy-GB" dirty="0"/>
-              <a:t> - the process of using data from a sample to make estimates or test hypotheses about a population.</a:t>
+              <a:t> - using data from a noisy sample to make estimates or test hypotheses about the whole population.</a:t>
             </a:r>
           </a:p>
           <a:p>
